--- a/docs/presentation/decoration-preview-service_4b541b44.pptx
+++ b/docs/presentation/decoration-preview-service_4b541b44.pptx
@@ -6810,6 +6810,45 @@
           </a:p>
         </p:txBody>
       </p:sp>
+      <p:sp>
+        <p:nvSpPr>
+          <p:cNvPr id="60" name="Text 54"/>
+          <p:cNvSpPr txBox="1"/>
+          <p:nvPr/>
+        </p:nvSpPr>
+        <p:spPr>
+          <a:xfrm>
+            <a:off x="6156770" y="6172200"/>
+            <a:ext cx="5447348" cy="203200"/>
+          </a:xfrm>
+          <a:prstGeom prst="rect">
+            <a:avLst/>
+          </a:prstGeom>
+          <a:noFill/>
+          <a:ln/>
+        </p:spPr>
+        <p:txBody>
+          <a:bodyPr wrap="none" lIns="0" tIns="0" rIns="0" bIns="0" rtlCol="0" anchor="ctr"/>
+          <a:lstStyle/>
+          <a:p>
+            <a:pPr algn="r" indent="0" marL="0">
+              <a:buNone/>
+            </a:pPr>
+            <a:r>
+              <a:rPr lang="en-US" sz="1097" dirty="0">
+                <a:solidFill>
+                  <a:srgbClr val="94A3B8"/>
+                </a:solidFill>
+                <a:latin typeface="Century Gothic" pitchFamily="34" charset="0"/>
+                <a:ea typeface="Century Gothic" pitchFamily="34" charset="-122"/>
+                <a:cs typeface="Century Gothic" pitchFamily="34" charset="-120"/>
+              </a:rPr>
+              <a:t>Live demo endpoint: http://decoration-preview-alb-1021450355.eu-central-1.elb.amazonaws.com/</a:t>
+            </a:r>
+            <a:endParaRPr lang="en-US" sz="1097" dirty="0"/>
+          </a:p>
+        </p:txBody>
+      </p:sp>
     </p:spTree>
   </p:cSld>
   <p:clrMapOvr>

--- a/docs/presentation/decoration-preview-service_4b541b44.pptx
+++ b/docs/presentation/decoration-preview-service_4b541b44.pptx
@@ -3122,7 +3122,7 @@
                 <a:ea typeface="Century Gothic" pitchFamily="34" charset="-122"/>
                 <a:cs typeface="Century Gothic" pitchFamily="34" charset="-120"/>
               </a:rPr>
-              <a:t>Lead Engineer</a:t>
+              <a:t>Patrick Klie</a:t>
             </a:r>
             <a:endParaRPr lang="en-US" sz="4788" dirty="0"/>
           </a:p>
@@ -3243,7 +3243,7 @@
                 <a:ea typeface="Century Gothic" pitchFamily="34" charset="-122"/>
                 <a:cs typeface="Century Gothic" pitchFamily="34" charset="-120"/>
               </a:rPr>
-              <a:t>30-Minute Presentation</a:t>
+              <a:t>Lead Engineer, Creative Tooling interview</a:t>
             </a:r>
             <a:endParaRPr lang="en-US" sz="1496" dirty="0"/>
           </a:p>
@@ -3306,6 +3306,45 @@
                 <a:cs typeface="Century Gothic" pitchFamily="34" charset="-120"/>
               </a:rPr>
               <a:t>Engineering · Design · Senior Leadership</a:t>
+            </a:r>
+            <a:endParaRPr lang="en-US" sz="1496" dirty="0"/>
+          </a:p>
+        </p:txBody>
+      </p:sp>
+      <p:sp>
+        <p:nvSpPr>
+          <p:cNvPr id="11" name="Text 7"/>
+          <p:cNvSpPr txBox="1"/>
+          <p:nvPr/>
+        </p:nvSpPr>
+        <p:spPr>
+          <a:xfrm>
+            <a:off x="4110847" y="5375288"/>
+            <a:ext cx="3939826" cy="228600"/>
+          </a:xfrm>
+          <a:prstGeom prst="rect">
+            <a:avLst/>
+          </a:prstGeom>
+          <a:noFill/>
+          <a:ln/>
+        </p:spPr>
+        <p:txBody>
+          <a:bodyPr wrap="square" lIns="0" tIns="0" rIns="0" bIns="0" rtlCol="0" anchor="ctr"/>
+          <a:lstStyle/>
+          <a:p>
+            <a:pPr algn="ctr" indent="0" marL="0">
+              <a:buNone/>
+            </a:pPr>
+            <a:r>
+              <a:rPr lang="en-US" sz="1496" dirty="0">
+                <a:solidFill>
+                  <a:srgbClr val="94A3B8"/>
+                </a:solidFill>
+                <a:latin typeface="Century Gothic" pitchFamily="34" charset="0"/>
+                <a:ea typeface="Century Gothic" pitchFamily="34" charset="-122"/>
+                <a:cs typeface="Century Gothic" pitchFamily="34" charset="-120"/>
+              </a:rPr>
+              <a:t>8 April 2026</a:t>
             </a:r>
             <a:endParaRPr lang="en-US" sz="1496" dirty="0"/>
           </a:p>

--- a/docs/presentation/decoration-preview-service_4b541b44.pptx
+++ b/docs/presentation/decoration-preview-service_4b541b44.pptx
@@ -3130,6 +3130,84 @@
       </p:sp>
       <p:sp>
         <p:nvSpPr>
+          <p:cNvPr id="11" name="Text 7"/>
+          <p:cNvSpPr txBox="1"/>
+          <p:nvPr/>
+        </p:nvSpPr>
+        <p:spPr>
+          <a:xfrm>
+            <a:off x="2837688" y="3702075"/>
+            <a:ext cx="6486144" cy="254000"/>
+          </a:xfrm>
+          <a:prstGeom prst="rect">
+            <a:avLst/>
+          </a:prstGeom>
+          <a:noFill/>
+          <a:ln/>
+        </p:spPr>
+        <p:txBody>
+          <a:bodyPr wrap="square" lIns="0" tIns="0" rIns="0" bIns="0" rtlCol="0" anchor="ctr"/>
+          <a:lstStyle/>
+          <a:p>
+            <a:pPr algn="ctr" indent="0" marL="0">
+              <a:buNone/>
+            </a:pPr>
+            <a:r>
+              <a:rPr lang="en-US" sz="1795" dirty="0">
+                <a:solidFill>
+                  <a:srgbClr val="94A3B8"/>
+                </a:solidFill>
+                <a:latin typeface="Century Gothic" pitchFamily="34" charset="0"/>
+                <a:ea typeface="Century Gothic" pitchFamily="34" charset="-122"/>
+                <a:cs typeface="Century Gothic" pitchFamily="34" charset="-120"/>
+              </a:rPr>
+              <a:t>Lead Engineer, Creative Tooling interview</a:t>
+            </a:r>
+            <a:endParaRPr lang="en-US" sz="1795" dirty="0"/>
+          </a:p>
+        </p:txBody>
+      </p:sp>
+      <p:sp>
+        <p:nvSpPr>
+          <p:cNvPr id="12" name="Text 8"/>
+          <p:cNvSpPr txBox="1"/>
+          <p:nvPr/>
+        </p:nvSpPr>
+        <p:spPr>
+          <a:xfrm>
+            <a:off x="4110847" y="3966075"/>
+            <a:ext cx="3939826" cy="228600"/>
+          </a:xfrm>
+          <a:prstGeom prst="rect">
+            <a:avLst/>
+          </a:prstGeom>
+          <a:noFill/>
+          <a:ln/>
+        </p:spPr>
+        <p:txBody>
+          <a:bodyPr wrap="square" lIns="0" tIns="0" rIns="0" bIns="0" rtlCol="0" anchor="ctr"/>
+          <a:lstStyle/>
+          <a:p>
+            <a:pPr algn="ctr" indent="0" marL="0">
+              <a:buNone/>
+            </a:pPr>
+            <a:r>
+              <a:rPr lang="en-US" sz="1496" dirty="0">
+                <a:solidFill>
+                  <a:srgbClr val="64748B"/>
+                </a:solidFill>
+                <a:latin typeface="Century Gothic" pitchFamily="34" charset="0"/>
+                <a:ea typeface="Century Gothic" pitchFamily="34" charset="-122"/>
+                <a:cs typeface="Century Gothic" pitchFamily="34" charset="-120"/>
+              </a:rPr>
+              <a:t>8 April 2026</a:t>
+            </a:r>
+            <a:endParaRPr lang="en-US" sz="1496" dirty="0"/>
+          </a:p>
+        </p:txBody>
+      </p:sp>
+      <p:sp>
+        <p:nvSpPr>
           <p:cNvPr id="5" name="Shape 3"/>
           <p:cNvSpPr/>
           <p:nvPr/>
@@ -3243,7 +3321,7 @@
                 <a:ea typeface="Century Gothic" pitchFamily="34" charset="-122"/>
                 <a:cs typeface="Century Gothic" pitchFamily="34" charset="-120"/>
               </a:rPr>
-              <a:t>Lead Engineer, Creative Tooling interview</a:t>
+              <a:t>30-Minute Presentation</a:t>
             </a:r>
             <a:endParaRPr lang="en-US" sz="1496" dirty="0"/>
           </a:p>
@@ -3306,45 +3384,6 @@
                 <a:cs typeface="Century Gothic" pitchFamily="34" charset="-120"/>
               </a:rPr>
               <a:t>Engineering · Design · Senior Leadership</a:t>
-            </a:r>
-            <a:endParaRPr lang="en-US" sz="1496" dirty="0"/>
-          </a:p>
-        </p:txBody>
-      </p:sp>
-      <p:sp>
-        <p:nvSpPr>
-          <p:cNvPr id="11" name="Text 7"/>
-          <p:cNvSpPr txBox="1"/>
-          <p:nvPr/>
-        </p:nvSpPr>
-        <p:spPr>
-          <a:xfrm>
-            <a:off x="4110847" y="5375288"/>
-            <a:ext cx="3939826" cy="228600"/>
-          </a:xfrm>
-          <a:prstGeom prst="rect">
-            <a:avLst/>
-          </a:prstGeom>
-          <a:noFill/>
-          <a:ln/>
-        </p:spPr>
-        <p:txBody>
-          <a:bodyPr wrap="square" lIns="0" tIns="0" rIns="0" bIns="0" rtlCol="0" anchor="ctr"/>
-          <a:lstStyle/>
-          <a:p>
-            <a:pPr algn="ctr" indent="0" marL="0">
-              <a:buNone/>
-            </a:pPr>
-            <a:r>
-              <a:rPr lang="en-US" sz="1496" dirty="0">
-                <a:solidFill>
-                  <a:srgbClr val="94A3B8"/>
-                </a:solidFill>
-                <a:latin typeface="Century Gothic" pitchFamily="34" charset="0"/>
-                <a:ea typeface="Century Gothic" pitchFamily="34" charset="-122"/>
-                <a:cs typeface="Century Gothic" pitchFamily="34" charset="-120"/>
-              </a:rPr>
-              <a:t>8 April 2026</a:t>
             </a:r>
             <a:endParaRPr lang="en-US" sz="1496" dirty="0"/>
           </a:p>

--- a/docs/presentation/decoration-preview-service_4b541b44.pptx
+++ b/docs/presentation/decoration-preview-service_4b541b44.pptx
@@ -3032,7 +3032,7 @@
           <a:bodyPr wrap="square" lIns="0" tIns="0" rIns="0" bIns="0" rtlCol="0" anchor="ctr"/>
           <a:lstStyle/>
           <a:p>
-            <a:pPr algn="l" indent="0" marL="0">
+            <a:pPr algn="ctr" indent="0" marL="0">
               <a:buNone/>
             </a:pPr>
             <a:r>
@@ -3044,7 +3044,7 @@
                 <a:ea typeface="Century Gothic" pitchFamily="34" charset="-122"/>
                 <a:cs typeface="Century Gothic" pitchFamily="34" charset="-120"/>
               </a:rPr>
-              <a:t>Case Assignment Presentation</a:t>
+              <a:t>CASE ASSIGNMENT PRESENTATION</a:t>
             </a:r>
             <a:endParaRPr lang="en-US" sz="1496" dirty="0"/>
           </a:p>
@@ -3136,7 +3136,7 @@
         </p:nvSpPr>
         <p:spPr>
           <a:xfrm>
-            <a:off x="2837688" y="3702075"/>
+            <a:off x="2837688" y="3822075"/>
             <a:ext cx="6486144" cy="254000"/>
           </a:xfrm>
           <a:prstGeom prst="rect">
@@ -3175,7 +3175,7 @@
         </p:nvSpPr>
         <p:spPr>
           <a:xfrm>
-            <a:off x="4110847" y="3966075"/>
+            <a:off x="4110847" y="4126075"/>
             <a:ext cx="3939826" cy="228600"/>
           </a:xfrm>
           <a:prstGeom prst="rect">
@@ -3214,7 +3214,7 @@
         </p:nvSpPr>
         <p:spPr>
           <a:xfrm>
-            <a:off x="4813935" y="4156075"/>
+            <a:off x="4813935" y="4476075"/>
             <a:ext cx="2533650" cy="19050"/>
           </a:xfrm>
           <a:prstGeom prst="rect">
@@ -3234,7 +3234,7 @@
         </p:nvSpPr>
         <p:spPr>
           <a:xfrm>
-            <a:off x="2109264" y="4429125"/>
+            <a:off x="2109264" y="4749125"/>
             <a:ext cx="7942993" cy="254000"/>
           </a:xfrm>
           <a:prstGeom prst="rect">

--- a/docs/presentation/decoration-preview-service_4b541b44.pptx
+++ b/docs/presentation/decoration-preview-service_4b541b44.pptx
@@ -3136,7 +3136,7 @@
         </p:nvSpPr>
         <p:spPr>
           <a:xfrm>
-            <a:off x="2837688" y="3822075"/>
+            <a:off x="2837688" y="3922075"/>
             <a:ext cx="6486144" cy="254000"/>
           </a:xfrm>
           <a:prstGeom prst="rect">

--- a/docs/presentation/decoration-preview-service_4b541b44.pptx
+++ b/docs/presentation/decoration-preview-service_4b541b44.pptx
@@ -3136,7 +3136,7 @@
         </p:nvSpPr>
         <p:spPr>
           <a:xfrm>
-            <a:off x="2837688" y="3922075"/>
+            <a:off x="2837688" y="4022075"/>
             <a:ext cx="6486144" cy="254000"/>
           </a:xfrm>
           <a:prstGeom prst="rect">
@@ -3175,7 +3175,7 @@
         </p:nvSpPr>
         <p:spPr>
           <a:xfrm>
-            <a:off x="4110847" y="4126075"/>
+            <a:off x="4110847" y="4326075"/>
             <a:ext cx="3939826" cy="228600"/>
           </a:xfrm>
           <a:prstGeom prst="rect">
@@ -3214,7 +3214,7 @@
         </p:nvSpPr>
         <p:spPr>
           <a:xfrm>
-            <a:off x="4813935" y="4476075"/>
+            <a:off x="4813935" y="4706075"/>
             <a:ext cx="2533650" cy="19050"/>
           </a:xfrm>
           <a:prstGeom prst="rect">
@@ -3234,7 +3234,7 @@
         </p:nvSpPr>
         <p:spPr>
           <a:xfrm>
-            <a:off x="2109264" y="4749125"/>
+            <a:off x="2109264" y="5019125"/>
             <a:ext cx="7942993" cy="254000"/>
           </a:xfrm>
           <a:prstGeom prst="rect">
@@ -3280,7 +3280,7 @@
         </p:blipFill>
         <p:spPr>
           <a:xfrm>
-            <a:off x="2619161" y="5064125"/>
+            <a:off x="2619161" y="5334125"/>
             <a:ext cx="177356" cy="177800"/>
           </a:xfrm>
           <a:prstGeom prst="rect">
@@ -3296,7 +3296,7 @@
         </p:nvSpPr>
         <p:spPr>
           <a:xfrm>
-            <a:off x="2872526" y="5038725"/>
+            <a:off x="2872526" y="5308725"/>
             <a:ext cx="2242280" cy="228600"/>
           </a:xfrm>
           <a:prstGeom prst="rect">
@@ -3342,7 +3342,7 @@
         </p:blipFill>
         <p:spPr>
           <a:xfrm>
-            <a:off x="5418844" y="5064125"/>
+            <a:off x="5418844" y="5334125"/>
             <a:ext cx="177356" cy="177800"/>
           </a:xfrm>
           <a:prstGeom prst="rect">
@@ -3358,7 +3358,7 @@
         </p:nvSpPr>
         <p:spPr>
           <a:xfrm>
-            <a:off x="5672209" y="5038725"/>
+            <a:off x="5672209" y="5308725"/>
             <a:ext cx="3870150" cy="228600"/>
           </a:xfrm>
           <a:prstGeom prst="rect">

--- a/docs/presentation/decoration-preview-service_4b541b44.pptx
+++ b/docs/presentation/decoration-preview-service_4b541b44.pptx
@@ -526,7 +526,21 @@
           <a:p>
             <a:r>
               <a:rPr lang="en-US" dirty="0"/>
-              <a:t/>
+              <a:t>This presentation has two parts. First, I will walk through a concrete service I designed for designers: a decoration preview platform that shortens feedback loops from hours to minutes.</a:t>
+            </a:r>
+            <a:endParaRPr lang="en-US" dirty="0"/>
+          </a:p>
+          <a:p>
+            <a:r>
+              <a:rPr lang="en-US" dirty="0"/>
+              <a:t>Second, I will step up a level and show how I would consolidate a fragmented creative-tooling landscape into a shared platform over time.</a:t>
+            </a:r>
+            <a:endParaRPr lang="en-US" dirty="0"/>
+          </a:p>
+          <a:p>
+            <a:r>
+              <a:rPr lang="en-US" dirty="0"/>
+              <a:t>I will keep the first part to about ten minutes, the second part to about twenty, and leave ten minutes for questions.</a:t>
             </a:r>
             <a:endParaRPr lang="en-US" dirty="0"/>
           </a:p>
@@ -614,7 +628,21 @@
           <a:p>
             <a:r>
               <a:rPr lang="en-US" dirty="0"/>
-              <a:t/>
+              <a:t>These design principles show the engineering posture behind the system.</a:t>
+            </a:r>
+            <a:endParaRPr lang="en-US" dirty="0"/>
+          </a:p>
+          <a:p>
+            <a:r>
+              <a:rPr lang="en-US" dirty="0"/>
+              <a:t>Async by default protects user experience. Separation of concerns keeps the code maintainable. Fail-fast validation protects downstream systems. Idempotency protects correctness. Designing for failure protects operations.</a:t>
+            </a:r>
+            <a:endParaRPr lang="en-US" dirty="0"/>
+          </a:p>
+          <a:p>
+            <a:r>
+              <a:rPr lang="en-US" dirty="0"/>
+              <a:t>I want the architecture to be understandable under pressure, not just elegant on a whiteboard.</a:t>
             </a:r>
             <a:endParaRPr lang="en-US" dirty="0"/>
           </a:p>
@@ -702,7 +730,21 @@
           <a:p>
             <a:r>
               <a:rPr lang="en-US" dirty="0"/>
-              <a:t/>
+              <a:t>This slide is where I separate target architecture from current implementation maturity.</a:t>
+            </a:r>
+            <a:endParaRPr lang="en-US" dirty="0"/>
+          </a:p>
+          <a:p>
+            <a:r>
+              <a:rPr lang="en-US" dirty="0"/>
+              <a:t>What is already built is the API surface, the main infrastructure definition, and the overall service skeleton. What is still stubbed is the true rendering engine and some full production wiring.</a:t>
+            </a:r>
+            <a:endParaRPr lang="en-US" dirty="0"/>
+          </a:p>
+          <a:p>
+            <a:r>
+              <a:rPr lang="en-US" dirty="0"/>
+              <a:t>That is intentional. For a case assignment, I would rather show clear interfaces, disciplined scope, and an upgrade path than pretend every production detail is already done.</a:t>
             </a:r>
             <a:endParaRPr lang="en-US" dirty="0"/>
           </a:p>
@@ -790,7 +832,14 @@
           <a:p>
             <a:r>
               <a:rPr lang="en-US" dirty="0"/>
-              <a:t/>
+              <a:t>The key decisions are straightforward. Use async because user experience demands it. Use AWS managed services because they reduce undifferentiated operational work. Treat security as a first-order requirement, not an afterthought.</a:t>
+            </a:r>
+            <a:endParaRPr lang="en-US" dirty="0"/>
+          </a:p>
+          <a:p>
+            <a:r>
+              <a:rPr lang="en-US" dirty="0"/>
+              <a:t>More broadly, this part of the presentation is meant to demonstrate how I connect product need, system design, and pragmatic delivery.</a:t>
             </a:r>
             <a:endParaRPr lang="en-US" dirty="0"/>
           </a:p>
@@ -878,7 +927,21 @@
           <a:p>
             <a:r>
               <a:rPr lang="en-US" dirty="0"/>
-              <a:t/>
+              <a:t>The second half zooms out from one service to the broader tooling landscape.</a:t>
+            </a:r>
+            <a:endParaRPr lang="en-US" dirty="0"/>
+          </a:p>
+          <a:p>
+            <a:r>
+              <a:rPr lang="en-US" dirty="0"/>
+              <a:t>This is the pattern I see often in creative organizations: multiple tools, different stacks, duplicated infrastructure, uneven ownership, and a lot of tacit knowledge living inside a few people.</a:t>
+            </a:r>
+            <a:endParaRPr lang="en-US" dirty="0"/>
+          </a:p>
+          <a:p>
+            <a:r>
+              <a:rPr lang="en-US" dirty="0"/>
+              <a:t>The technical problem is fragmentation. The organizational problem is fragility.</a:t>
             </a:r>
             <a:endParaRPr lang="en-US" dirty="0"/>
           </a:p>
@@ -966,7 +1029,21 @@
           <a:p>
             <a:r>
               <a:rPr lang="en-US" dirty="0"/>
-              <a:t/>
+              <a:t>My proposed end state is not one giant monolith. It is a modular platform with shared services where common capabilities are built once and reused.</a:t>
+            </a:r>
+            <a:endParaRPr lang="en-US" dirty="0"/>
+          </a:p>
+          <a:p>
+            <a:r>
+              <a:rPr lang="en-US" dirty="0"/>
+              <a:t>That means tools can remain specialized where they should be, while auth, observability, data access patterns, and UI primitives become consistent.</a:t>
+            </a:r>
+            <a:endParaRPr lang="en-US" dirty="0"/>
+          </a:p>
+          <a:p>
+            <a:r>
+              <a:rPr lang="en-US" dirty="0"/>
+              <a:t>The payoff is faster delivery, lower operational overhead, and less bus-factor risk.</a:t>
             </a:r>
             <a:endParaRPr lang="en-US" dirty="0"/>
           </a:p>
@@ -1054,7 +1131,21 @@
           <a:p>
             <a:r>
               <a:rPr lang="en-US" dirty="0"/>
-              <a:t/>
+              <a:t>Architecturally, the platform separates tool modules from shared services and infrastructure.</a:t>
+            </a:r>
+            <a:endParaRPr lang="en-US" dirty="0"/>
+          </a:p>
+          <a:p>
+            <a:r>
+              <a:rPr lang="en-US" dirty="0"/>
+              <a:t>That structure is important because it avoids two common mistakes: letting every tool reinvent the same foundations, or forcing every workflow into a single application that fits none of them well.</a:t>
+            </a:r>
+            <a:endParaRPr lang="en-US" dirty="0"/>
+          </a:p>
+          <a:p>
+            <a:r>
+              <a:rPr lang="en-US" dirty="0"/>
+              <a:t>I want modularity at the tool layer and standardization at the service layer.</a:t>
             </a:r>
             <a:endParaRPr lang="en-US" dirty="0"/>
           </a:p>
@@ -1142,7 +1233,21 @@
           <a:p>
             <a:r>
               <a:rPr lang="en-US" dirty="0"/>
-              <a:t/>
+              <a:t>The migration philosophy is as important as the target architecture.</a:t>
+            </a:r>
+            <a:endParaRPr lang="en-US" dirty="0"/>
+          </a:p>
+          <a:p>
+            <a:r>
+              <a:rPr lang="en-US" dirty="0"/>
+              <a:t>No big bang, designer first, always an escape hatch. Those are not slogans. They are operating constraints.</a:t>
+            </a:r>
+            <a:endParaRPr lang="en-US" dirty="0"/>
+          </a:p>
+          <a:p>
+            <a:r>
+              <a:rPr lang="en-US" dirty="0"/>
+              <a:t>If the people using the tools feel change is being done to them instead of with them, even the right architecture will fail.</a:t>
             </a:r>
             <a:endParaRPr lang="en-US" dirty="0"/>
           </a:p>
@@ -1230,7 +1335,21 @@
           <a:p>
             <a:r>
               <a:rPr lang="en-US" dirty="0"/>
-              <a:t/>
+              <a:t>The roadmap is phased because sequencing is strategy.</a:t>
+            </a:r>
+            <a:endParaRPr lang="en-US" dirty="0"/>
+          </a:p>
+          <a:p>
+            <a:r>
+              <a:rPr lang="en-US" dirty="0"/>
+              <a:t>You do not start with the hardest legacy tool. You start by building trust, then prove value with a visible win, then consolidate low-risk areas, and only then take on the critical migrations.</a:t>
+            </a:r>
+            <a:endParaRPr lang="en-US" dirty="0"/>
+          </a:p>
+          <a:p>
+            <a:r>
+              <a:rPr lang="en-US" dirty="0"/>
+              <a:t>That pacing lowers both technical and social risk.</a:t>
             </a:r>
             <a:endParaRPr lang="en-US" dirty="0"/>
           </a:p>
@@ -1318,7 +1437,21 @@
           <a:p>
             <a:r>
               <a:rPr lang="en-US" dirty="0"/>
-              <a:t/>
+              <a:t>Phase zero is about trust and foundations. Before asking teams to migrate, I would establish the shared services layer, the delivery model, and the feedback channels.</a:t>
+            </a:r>
+            <a:endParaRPr lang="en-US" dirty="0"/>
+          </a:p>
+          <a:p>
+            <a:r>
+              <a:rPr lang="en-US" dirty="0"/>
+              <a:t>Phase one then uses the preview service as a credibility move: something useful, visible, and low-friction that demonstrates the platform approach in practice.</a:t>
+            </a:r>
+            <a:endParaRPr lang="en-US" dirty="0"/>
+          </a:p>
+          <a:p>
+            <a:r>
+              <a:rPr lang="en-US" dirty="0"/>
+              <a:t>This is how you earn permission to do the harder work later.</a:t>
             </a:r>
             <a:endParaRPr lang="en-US" dirty="0"/>
           </a:p>
@@ -1406,7 +1539,21 @@
           <a:p>
             <a:r>
               <a:rPr lang="en-US" dirty="0"/>
-              <a:t/>
+              <a:t>Once the first win is live, I would consolidate scripts and low-risk utilities to reduce obvious duplication and improve developer productivity.</a:t>
+            </a:r>
+            <a:endParaRPr lang="en-US" dirty="0"/>
+          </a:p>
+          <a:p>
+            <a:r>
+              <a:rPr lang="en-US" dirty="0"/>
+              <a:t>Then I would tackle the critical undocumented legacy tool with a very different posture: heavy validation, shadow mode, and rollback at every stage.</a:t>
+            </a:r>
+            <a:endParaRPr lang="en-US" dirty="0"/>
+          </a:p>
+          <a:p>
+            <a:r>
+              <a:rPr lang="en-US" dirty="0"/>
+              <a:t>The point is not speed at all costs. The point is progress without loss of trust.</a:t>
             </a:r>
             <a:endParaRPr lang="en-US" dirty="0"/>
           </a:p>
@@ -1494,7 +1641,14 @@
           <a:p>
             <a:r>
               <a:rPr lang="en-US" dirty="0"/>
-              <a:t/>
+              <a:t>The agenda is deliberate. I start with a real technical problem and a concrete architecture so you can see how I think as an engineer.</a:t>
+            </a:r>
+            <a:endParaRPr lang="en-US" dirty="0"/>
+          </a:p>
+          <a:p>
+            <a:r>
+              <a:rPr lang="en-US" dirty="0"/>
+              <a:t>Then I move into platform strategy, migration sequencing, and change management, because the Lead Engineer role is not only about building systems. It is also about choosing what to build first, how to earn trust, and how to move an organization without breaking it.</a:t>
             </a:r>
             <a:endParaRPr lang="en-US" dirty="0"/>
           </a:p>
@@ -1582,7 +1736,21 @@
           <a:p>
             <a:r>
               <a:rPr lang="en-US" dirty="0"/>
-              <a:t/>
+              <a:t>For the highest-risk legacy replacement, I would treat observed behavior as the specification.</a:t>
+            </a:r>
+            <a:endParaRPr lang="en-US" dirty="0"/>
+          </a:p>
+          <a:p>
+            <a:r>
+              <a:rPr lang="en-US" dirty="0"/>
+              <a:t>That means capturing real input-output pairs, running the new system in parallel, measuring divergence, and only increasing traffic when the evidence supports it.</a:t>
+            </a:r>
+            <a:endParaRPr lang="en-US" dirty="0"/>
+          </a:p>
+          <a:p>
+            <a:r>
+              <a:rPr lang="en-US" dirty="0"/>
+              <a:t>A disciplined migration here is better than a heroic rewrite.</a:t>
             </a:r>
             <a:endParaRPr lang="en-US" dirty="0"/>
           </a:p>
@@ -1670,7 +1838,21 @@
           <a:p>
             <a:r>
               <a:rPr lang="en-US" dirty="0"/>
-              <a:t/>
+              <a:t>Desktop migration is where many transformation programs fail because they underestimate habit and muscle memory.</a:t>
+            </a:r>
+            <a:endParaRPr lang="en-US" dirty="0"/>
+          </a:p>
+          <a:p>
+            <a:r>
+              <a:rPr lang="en-US" dirty="0"/>
+              <a:t>My approach would preserve familiar workflows first, then improve around them. I would use designer-led beta programs, phased parity, and strict avoidance of launch-window disruption.</a:t>
+            </a:r>
+            <a:endParaRPr lang="en-US" dirty="0"/>
+          </a:p>
+          <a:p>
+            <a:r>
+              <a:rPr lang="en-US" dirty="0"/>
+              <a:t>Adoption should feel chosen, not imposed.</a:t>
             </a:r>
             <a:endParaRPr lang="en-US" dirty="0"/>
           </a:p>
@@ -1758,7 +1940,21 @@
           <a:p>
             <a:r>
               <a:rPr lang="en-US" dirty="0"/>
-              <a:t/>
+              <a:t>I would treat AI as a later phase and a product capability, not a branding exercise.</a:t>
+            </a:r>
+            <a:endParaRPr lang="en-US" dirty="0"/>
+          </a:p>
+          <a:p>
+            <a:r>
+              <a:rPr lang="en-US" dirty="0"/>
+              <a:t>The ordering matters: start with low-risk, high-value assistance such as smart search or tagging, measure usage and trust, and keep a clear designer veto.</a:t>
+            </a:r>
+            <a:endParaRPr lang="en-US" dirty="0"/>
+          </a:p>
+          <a:p>
+            <a:r>
+              <a:rPr lang="en-US" dirty="0"/>
+              <a:t>Only after demand and ROI are proven would I move into more generative or experimental territory.</a:t>
             </a:r>
             <a:endParaRPr lang="en-US" dirty="0"/>
           </a:p>
@@ -1846,7 +2042,21 @@
           <a:p>
             <a:r>
               <a:rPr lang="en-US" dirty="0"/>
-              <a:t/>
+              <a:t>This slide addresses resistance directly because resistance is usually rational.</a:t>
+            </a:r>
+            <a:endParaRPr lang="en-US" dirty="0"/>
+          </a:p>
+          <a:p>
+            <a:r>
+              <a:rPr lang="en-US" dirty="0"/>
+              <a:t>People worry about losing speed, breaking workflows, being excluded from decisions, or being displaced by automation. Those concerns should be answered concretely with rollout design, governance, and rollback, not just optimism.</a:t>
+            </a:r>
+            <a:endParaRPr lang="en-US" dirty="0"/>
+          </a:p>
+          <a:p>
+            <a:r>
+              <a:rPr lang="en-US" dirty="0"/>
+              <a:t>Change management is part of engineering leadership here.</a:t>
             </a:r>
             <a:endParaRPr lang="en-US" dirty="0"/>
           </a:p>
@@ -1934,7 +2144,21 @@
           <a:p>
             <a:r>
               <a:rPr lang="en-US" dirty="0"/>
-              <a:t/>
+              <a:t>Success metrics need to balance system health, user adoption, and business impact.</a:t>
+            </a:r>
+            <a:endParaRPr lang="en-US" dirty="0"/>
+          </a:p>
+          <a:p>
+            <a:r>
+              <a:rPr lang="en-US" dirty="0"/>
+              <a:t>If uptime is good but nobody adopts the tools, the program is failing. If adoption is high but cost or reliability are out of control, the program is still failing.</a:t>
+            </a:r>
+            <a:endParaRPr lang="en-US" dirty="0"/>
+          </a:p>
+          <a:p>
+            <a:r>
+              <a:rPr lang="en-US" dirty="0"/>
+              <a:t>So I measure across technical performance, user satisfaction, workflow improvement, and financial efficiency.</a:t>
             </a:r>
             <a:endParaRPr lang="en-US" dirty="0"/>
           </a:p>
@@ -2022,7 +2246,21 @@
           <a:p>
             <a:r>
               <a:rPr lang="en-US" dirty="0"/>
-              <a:t/>
+              <a:t>To summarize: I would lead with a concrete product win, use it to establish a platform model, and then scale that model through disciplined migration and designer-centered change management.</a:t>
+            </a:r>
+            <a:endParaRPr lang="en-US" dirty="0"/>
+          </a:p>
+          <a:p>
+            <a:r>
+              <a:rPr lang="en-US" dirty="0"/>
+              <a:t>The theme across both halves is the same: build credible systems, keep the user workflow central, and deliver change in a way the organization can absorb.</a:t>
+            </a:r>
+            <a:endParaRPr lang="en-US" dirty="0"/>
+          </a:p>
+          <a:p>
+            <a:r>
+              <a:rPr lang="en-US" dirty="0"/>
+              <a:t>I am happy to go deeper on architecture, migration execution, or how I would prioritize the first six months in the role.</a:t>
             </a:r>
             <a:endParaRPr lang="en-US" dirty="0"/>
           </a:p>
@@ -2110,7 +2348,21 @@
           <a:p>
             <a:r>
               <a:rPr lang="en-US" dirty="0"/>
-              <a:t/>
+              <a:t>The core problem is not just rendering speed. It is creative interruption.</a:t>
+            </a:r>
+            <a:endParaRPr lang="en-US" dirty="0"/>
+          </a:p>
+          <a:p>
+            <a:r>
+              <a:rPr lang="en-US" dirty="0"/>
+              <a:t>When designers wait hours for a preview, the cost is not only elapsed time. It is broken flow, slower iteration, and weaker collaboration because feedback arrives too late.</a:t>
+            </a:r>
+            <a:endParaRPr lang="en-US" dirty="0"/>
+          </a:p>
+          <a:p>
+            <a:r>
+              <a:rPr lang="en-US" dirty="0"/>
+              <a:t>So the design goal for this service is to remove waiting from the designer experience, not just to optimize infrastructure metrics.</a:t>
             </a:r>
             <a:endParaRPr lang="en-US" dirty="0"/>
           </a:p>
@@ -2198,7 +2450,21 @@
           <a:p>
             <a:r>
               <a:rPr lang="en-US" dirty="0"/>
-              <a:t/>
+              <a:t>My solution vision is an async, cloud-native service that lets designers submit work and immediately continue with the rest of their job.</a:t>
+            </a:r>
+            <a:endParaRPr lang="en-US" dirty="0"/>
+          </a:p>
+          <a:p>
+            <a:r>
+              <a:rPr lang="en-US" dirty="0"/>
+              <a:t>That leads to four design constraints: it has to be asynchronous, secure by default because the artwork is sensitive, operationally simple, and able to scale without redesign.</a:t>
+            </a:r>
+            <a:endParaRPr lang="en-US" dirty="0"/>
+          </a:p>
+          <a:p>
+            <a:r>
+              <a:rPr lang="en-US" dirty="0"/>
+              <a:t>The point is not technology for its own sake. The point is to preserve creative momentum.</a:t>
             </a:r>
             <a:endParaRPr lang="en-US" dirty="0"/>
           </a:p>
@@ -2286,7 +2552,21 @@
           <a:p>
             <a:r>
               <a:rPr lang="en-US" dirty="0"/>
-              <a:t/>
+              <a:t>At the context level, the service sits between people doing creative work and systems that already own adjacent domains.</a:t>
+            </a:r>
+            <a:endParaRPr lang="en-US" dirty="0"/>
+          </a:p>
+          <a:p>
+            <a:r>
+              <a:rPr lang="en-US" dirty="0"/>
+              <a:t>Designers and design managers are the primary users. Existing enterprise systems remain the source of truth for templates, 3D models, identity, and notifications.</a:t>
+            </a:r>
+            <a:endParaRPr lang="en-US" dirty="0"/>
+          </a:p>
+          <a:p>
+            <a:r>
+              <a:rPr lang="en-US" dirty="0"/>
+              <a:t>That separation matters because it keeps the preview service focused on one job: transforming input artwork into fast, trustworthy visual feedback.</a:t>
             </a:r>
             <a:endParaRPr lang="en-US" dirty="0"/>
           </a:p>
@@ -2374,7 +2654,21 @@
           <a:p>
             <a:r>
               <a:rPr lang="en-US" dirty="0"/>
-              <a:t/>
+              <a:t>At the container level, I split the architecture into a thin API layer, an asynchronous queue, rendering workers, persistent state, and an edge layer for delivery and protection.</a:t>
+            </a:r>
+            <a:endParaRPr lang="en-US" dirty="0"/>
+          </a:p>
+          <a:p>
+            <a:r>
+              <a:rPr lang="en-US" dirty="0"/>
+              <a:t>That decomposition gives clean scaling boundaries: the API scales on request load, workers scale on job backlog, and the storage layers remain independently managed.</a:t>
+            </a:r>
+            <a:endParaRPr lang="en-US" dirty="0"/>
+          </a:p>
+          <a:p>
+            <a:r>
+              <a:rPr lang="en-US" dirty="0"/>
+              <a:t>It also means a slow or expensive render never blocks the request path.</a:t>
             </a:r>
             <a:endParaRPr lang="en-US" dirty="0"/>
           </a:p>
@@ -2462,7 +2756,21 @@
           <a:p>
             <a:r>
               <a:rPr lang="en-US" dirty="0"/>
-              <a:t/>
+              <a:t>The API is intentionally small. Five endpoints are enough to express the user journey: submit, poll, retrieve, list, and cancel.</a:t>
+            </a:r>
+            <a:endParaRPr lang="en-US" dirty="0"/>
+          </a:p>
+          <a:p>
+            <a:r>
+              <a:rPr lang="en-US" dirty="0"/>
+              <a:t>I prefer this submit-and-poll model here because it is resilient, easy to secure, and a good fit for work that can take seconds or minutes.</a:t>
+            </a:r>
+            <a:endParaRPr lang="en-US" dirty="0"/>
+          </a:p>
+          <a:p>
+            <a:r>
+              <a:rPr lang="en-US" dirty="0"/>
+              <a:t>Even if the rendering engine changes later, that contract remains stable for clients.</a:t>
             </a:r>
             <a:endParaRPr lang="en-US" dirty="0"/>
           </a:p>
@@ -2550,7 +2858,21 @@
           <a:p>
             <a:r>
               <a:rPr lang="en-US" dirty="0"/>
-              <a:t/>
+              <a:t>Security is layered because the content is high-value and potentially pre-release.</a:t>
+            </a:r>
+            <a:endParaRPr lang="en-US" dirty="0"/>
+          </a:p>
+          <a:p>
+            <a:r>
+              <a:rPr lang="en-US" dirty="0"/>
+              <a:t>I start with encryption, network isolation, WAF protection, application authentication, least-privilege IAM, and auditability. None of those alone is enough.</a:t>
+            </a:r>
+            <a:endParaRPr lang="en-US" dirty="0"/>
+          </a:p>
+          <a:p>
+            <a:r>
+              <a:rPr lang="en-US" dirty="0"/>
+              <a:t>In practice, what I want is defense in depth: if one layer is misconfigured or bypassed, the blast radius stays contained.</a:t>
             </a:r>
             <a:endParaRPr lang="en-US" dirty="0"/>
           </a:p>
@@ -2638,7 +2960,21 @@
           <a:p>
             <a:r>
               <a:rPr lang="en-US" dirty="0"/>
-              <a:t/>
+              <a:t>For scalability, I focus on two things: predictable response time at the API edge and elastic throughput in the rendering tier.</a:t>
+            </a:r>
+            <a:endParaRPr lang="en-US" dirty="0"/>
+          </a:p>
+          <a:p>
+            <a:r>
+              <a:rPr lang="en-US" dirty="0"/>
+              <a:t>The service should comfortably handle modest early adoption, but the architecture should also survive success. That is why I chose managed services and queue-driven worker scaling.</a:t>
+            </a:r>
+            <a:endParaRPr lang="en-US" dirty="0"/>
+          </a:p>
+          <a:p>
+            <a:r>
+              <a:rPr lang="en-US" dirty="0"/>
+              <a:t>The cost model is staged as well, so we do not overbuild before the business case is proven.</a:t>
             </a:r>
             <a:endParaRPr lang="en-US" dirty="0"/>
           </a:p>
